--- a/internal_doc/03.开发设计/ACID/数据文件设计/数据文件设计讨论会20181220.pptx
+++ b/internal_doc/03.开发设计/ACID/数据文件设计/数据文件设计讨论会20181220.pptx
@@ -5,7 +5,7 @@
     <p:sldMasterId id="2147483648" r:id="rId1"/>
   </p:sldMasterIdLst>
   <p:notesMasterIdLst>
-    <p:notesMasterId r:id="rId19"/>
+    <p:notesMasterId r:id="rId18"/>
   </p:notesMasterIdLst>
   <p:sldIdLst>
     <p:sldId id="256" r:id="rId2"/>
@@ -24,7 +24,6 @@
     <p:sldId id="278" r:id="rId15"/>
     <p:sldId id="268" r:id="rId16"/>
     <p:sldId id="260" r:id="rId17"/>
-    <p:sldId id="276" r:id="rId18"/>
   </p:sldIdLst>
   <p:sldSz cx="12192000" cy="6858000"/>
   <p:notesSz cx="6858000" cy="9144000"/>
@@ -133,7 +132,7 @@
 
 <file path=ppt/commentAuthors.xml><?xml version="1.0" encoding="utf-8"?>
 <p:cmAuthorLst xmlns:a="http://schemas.openxmlformats.org/drawingml/2006/main" xmlns:r="http://schemas.openxmlformats.org/officeDocument/2006/relationships" xmlns:p="http://schemas.openxmlformats.org/presentationml/2006/main">
-  <p:cmAuthor id="1" name="linyoubin" initials="l" lastIdx="1" clrIdx="0">
+  <p:cmAuthor id="1" name="linyoubin" initials="l" lastIdx="7" clrIdx="0">
     <p:extLst>
       <p:ext uri="{19B8F6BF-5375-455C-9EA6-DF929625EA0E}">
         <p15:presenceInfo xmlns:p15="http://schemas.microsoft.com/office/powerpoint/2012/main" userId="linyoubin" providerId="None"/>
@@ -141,6 +140,80 @@
     </p:extLst>
   </p:cmAuthor>
 </p:cmAuthorLst>
+</file>
+
+<file path=ppt/comments/comment1.xml><?xml version="1.0" encoding="utf-8"?>
+<p:cmLst xmlns:a="http://schemas.openxmlformats.org/drawingml/2006/main" xmlns:r="http://schemas.openxmlformats.org/officeDocument/2006/relationships" xmlns:p="http://schemas.openxmlformats.org/presentationml/2006/main">
+  <p:cm authorId="1" dt="2019-01-09T21:35:48.711" idx="2">
+    <p:pos x="4272" y="456"/>
+    <p:text>元数据的LSN是否需要增加， DDL</p:text>
+    <p:extLst>
+      <p:ext uri="{C676402C-5697-4E1C-873F-D02D1690AC5C}">
+        <p15:threadingInfo xmlns:p15="http://schemas.microsoft.com/office/powerpoint/2012/main" timeZoneBias="-480"/>
+      </p:ext>
+    </p:extLst>
+  </p:cm>
+</p:cmLst>
+</file>
+
+<file path=ppt/comments/comment2.xml><?xml version="1.0" encoding="utf-8"?>
+<p:cmLst xmlns:a="http://schemas.openxmlformats.org/drawingml/2006/main" xmlns:r="http://schemas.openxmlformats.org/officeDocument/2006/relationships" xmlns:p="http://schemas.openxmlformats.org/presentationml/2006/main">
+  <p:cm authorId="1" dt="2019-01-09T21:57:35.874" idx="3">
+    <p:pos x="4157" y="2986"/>
+    <p:text>可以省略 page num字段</p:text>
+    <p:extLst>
+      <p:ext uri="{C676402C-5697-4E1C-873F-D02D1690AC5C}">
+        <p15:threadingInfo xmlns:p15="http://schemas.microsoft.com/office/powerpoint/2012/main" timeZoneBias="-480"/>
+      </p:ext>
+    </p:extLst>
+  </p:cm>
+  <p:cm authorId="1" dt="2019-01-09T22:04:10.724" idx="4">
+    <p:pos x="4378" y="2467"/>
+    <p:text>type与EYE_CATCHER合并</p:text>
+    <p:extLst>
+      <p:ext uri="{C676402C-5697-4E1C-873F-D02D1690AC5C}">
+        <p15:threadingInfo xmlns:p15="http://schemas.microsoft.com/office/powerpoint/2012/main" timeZoneBias="-480"/>
+      </p:ext>
+    </p:extLst>
+  </p:cm>
+</p:cmLst>
+</file>
+
+<file path=ppt/comments/comment3.xml><?xml version="1.0" encoding="utf-8"?>
+<p:cmLst xmlns:a="http://schemas.openxmlformats.org/drawingml/2006/main" xmlns:r="http://schemas.openxmlformats.org/officeDocument/2006/relationships" xmlns:p="http://schemas.openxmlformats.org/presentationml/2006/main">
+  <p:cm authorId="1" dt="2019-01-09T22:16:30.701" idx="5">
+    <p:pos x="4469" y="1546"/>
+    <p:text>考虑是否有使用场景？</p:text>
+    <p:extLst>
+      <p:ext uri="{C676402C-5697-4E1C-873F-D02D1690AC5C}">
+        <p15:threadingInfo xmlns:p15="http://schemas.microsoft.com/office/powerpoint/2012/main" timeZoneBias="-480"/>
+      </p:ext>
+    </p:extLst>
+  </p:cm>
+  <p:cm authorId="1" dt="2019-01-09T22:16:44.974" idx="6">
+    <p:pos x="3288" y="1910"/>
+    <p:text>record count两字节</p:text>
+    <p:extLst>
+      <p:ext uri="{C676402C-5697-4E1C-873F-D02D1690AC5C}">
+        <p15:threadingInfo xmlns:p15="http://schemas.microsoft.com/office/powerpoint/2012/main" timeZoneBias="-480"/>
+      </p:ext>
+    </p:extLst>
+  </p:cm>
+</p:cmLst>
+</file>
+
+<file path=ppt/comments/comment4.xml><?xml version="1.0" encoding="utf-8"?>
+<p:cmLst xmlns:a="http://schemas.openxmlformats.org/drawingml/2006/main" xmlns:r="http://schemas.openxmlformats.org/officeDocument/2006/relationships" xmlns:p="http://schemas.openxmlformats.org/presentationml/2006/main">
+  <p:cm authorId="1" dt="2019-01-09T22:45:15.379" idx="7">
+    <p:pos x="7243" y="1382"/>
+    <p:text>具体算法需要再斟酌</p:text>
+    <p:extLst>
+      <p:ext uri="{C676402C-5697-4E1C-873F-D02D1690AC5C}">
+        <p15:threadingInfo xmlns:p15="http://schemas.microsoft.com/office/powerpoint/2012/main" timeZoneBias="-480"/>
+      </p:ext>
+    </p:extLst>
+  </p:cm>
+</p:cmLst>
 </file>
 
 <file path=ppt/notesMasters/notesMaster1.xml><?xml version="1.0" encoding="utf-8"?>
@@ -225,7 +298,7 @@
           <a:p>
             <a:fld id="{193CF9C5-560D-4BE0-8FF5-372197204B47}" type="datetimeFigureOut">
               <a:rPr lang="zh-CN" altLang="en-US" smtClean="0"/>
-              <a:t>2019/1/4</a:t>
+              <a:t>2019/1/9</a:t>
             </a:fld>
             <a:endParaRPr lang="zh-CN" altLang="en-US"/>
           </a:p>
@@ -2005,7 +2078,7 @@
           <a:p>
             <a:fld id="{67EDBE0D-D193-4915-9F9C-E6864CED25A9}" type="datetimeFigureOut">
               <a:rPr lang="zh-CN" altLang="en-US" smtClean="0"/>
-              <a:t>2019/1/4</a:t>
+              <a:t>2019/1/9</a:t>
             </a:fld>
             <a:endParaRPr lang="zh-CN" altLang="en-US"/>
           </a:p>
@@ -2175,7 +2248,7 @@
           <a:p>
             <a:fld id="{67EDBE0D-D193-4915-9F9C-E6864CED25A9}" type="datetimeFigureOut">
               <a:rPr lang="zh-CN" altLang="en-US" smtClean="0"/>
-              <a:t>2019/1/4</a:t>
+              <a:t>2019/1/9</a:t>
             </a:fld>
             <a:endParaRPr lang="zh-CN" altLang="en-US"/>
           </a:p>
@@ -2355,7 +2428,7 @@
           <a:p>
             <a:fld id="{67EDBE0D-D193-4915-9F9C-E6864CED25A9}" type="datetimeFigureOut">
               <a:rPr lang="zh-CN" altLang="en-US" smtClean="0"/>
-              <a:t>2019/1/4</a:t>
+              <a:t>2019/1/9</a:t>
             </a:fld>
             <a:endParaRPr lang="zh-CN" altLang="en-US"/>
           </a:p>
@@ -2525,7 +2598,7 @@
           <a:p>
             <a:fld id="{67EDBE0D-D193-4915-9F9C-E6864CED25A9}" type="datetimeFigureOut">
               <a:rPr lang="zh-CN" altLang="en-US" smtClean="0"/>
-              <a:t>2019/1/4</a:t>
+              <a:t>2019/1/9</a:t>
             </a:fld>
             <a:endParaRPr lang="zh-CN" altLang="en-US"/>
           </a:p>
@@ -2771,7 +2844,7 @@
           <a:p>
             <a:fld id="{67EDBE0D-D193-4915-9F9C-E6864CED25A9}" type="datetimeFigureOut">
               <a:rPr lang="zh-CN" altLang="en-US" smtClean="0"/>
-              <a:t>2019/1/4</a:t>
+              <a:t>2019/1/9</a:t>
             </a:fld>
             <a:endParaRPr lang="zh-CN" altLang="en-US"/>
           </a:p>
@@ -3003,7 +3076,7 @@
           <a:p>
             <a:fld id="{67EDBE0D-D193-4915-9F9C-E6864CED25A9}" type="datetimeFigureOut">
               <a:rPr lang="zh-CN" altLang="en-US" smtClean="0"/>
-              <a:t>2019/1/4</a:t>
+              <a:t>2019/1/9</a:t>
             </a:fld>
             <a:endParaRPr lang="zh-CN" altLang="en-US"/>
           </a:p>
@@ -3370,7 +3443,7 @@
           <a:p>
             <a:fld id="{67EDBE0D-D193-4915-9F9C-E6864CED25A9}" type="datetimeFigureOut">
               <a:rPr lang="zh-CN" altLang="en-US" smtClean="0"/>
-              <a:t>2019/1/4</a:t>
+              <a:t>2019/1/9</a:t>
             </a:fld>
             <a:endParaRPr lang="zh-CN" altLang="en-US"/>
           </a:p>
@@ -3488,7 +3561,7 @@
           <a:p>
             <a:fld id="{67EDBE0D-D193-4915-9F9C-E6864CED25A9}" type="datetimeFigureOut">
               <a:rPr lang="zh-CN" altLang="en-US" smtClean="0"/>
-              <a:t>2019/1/4</a:t>
+              <a:t>2019/1/9</a:t>
             </a:fld>
             <a:endParaRPr lang="zh-CN" altLang="en-US"/>
           </a:p>
@@ -3583,7 +3656,7 @@
           <a:p>
             <a:fld id="{67EDBE0D-D193-4915-9F9C-E6864CED25A9}" type="datetimeFigureOut">
               <a:rPr lang="zh-CN" altLang="en-US" smtClean="0"/>
-              <a:t>2019/1/4</a:t>
+              <a:t>2019/1/9</a:t>
             </a:fld>
             <a:endParaRPr lang="zh-CN" altLang="en-US"/>
           </a:p>
@@ -3860,7 +3933,7 @@
           <a:p>
             <a:fld id="{67EDBE0D-D193-4915-9F9C-E6864CED25A9}" type="datetimeFigureOut">
               <a:rPr lang="zh-CN" altLang="en-US" smtClean="0"/>
-              <a:t>2019/1/4</a:t>
+              <a:t>2019/1/9</a:t>
             </a:fld>
             <a:endParaRPr lang="zh-CN" altLang="en-US"/>
           </a:p>
@@ -4113,7 +4186,7 @@
           <a:p>
             <a:fld id="{67EDBE0D-D193-4915-9F9C-E6864CED25A9}" type="datetimeFigureOut">
               <a:rPr lang="zh-CN" altLang="en-US" smtClean="0"/>
-              <a:t>2019/1/4</a:t>
+              <a:t>2019/1/9</a:t>
             </a:fld>
             <a:endParaRPr lang="zh-CN" altLang="en-US"/>
           </a:p>
@@ -4326,7 +4399,7 @@
           <a:p>
             <a:fld id="{67EDBE0D-D193-4915-9F9C-E6864CED25A9}" type="datetimeFigureOut">
               <a:rPr lang="zh-CN" altLang="en-US" smtClean="0"/>
-              <a:t>2019/1/4</a:t>
+              <a:t>2019/1/9</a:t>
             </a:fld>
             <a:endParaRPr lang="zh-CN" altLang="en-US"/>
           </a:p>
@@ -6371,24 +6444,14 @@
                     <a:p>
                       <a:r>
                         <a:rPr lang="en-US" altLang="zh-CN" sz="1600" baseline="0" dirty="0" smtClean="0"/>
-                        <a:t>0x01 relation </a:t>
-                      </a:r>
+                        <a:t>0x01 relation leaf extent</a:t>
+                      </a:r>
+                    </a:p>
+                    <a:p>
                       <a:r>
                         <a:rPr lang="en-US" altLang="zh-CN" sz="1600" baseline="0" dirty="0" smtClean="0"/>
-                        <a:t>leaf extent</a:t>
-                      </a:r>
-                      <a:endParaRPr lang="en-US" altLang="zh-CN" sz="1600" baseline="0" dirty="0" smtClean="0"/>
-                    </a:p>
-                    <a:p>
-                      <a:r>
-                        <a:rPr lang="en-US" altLang="zh-CN" sz="1600" baseline="0" dirty="0" smtClean="0"/>
-                        <a:t>0x02 relation </a:t>
-                      </a:r>
-                      <a:r>
-                        <a:rPr lang="en-US" altLang="zh-CN" sz="1600" baseline="0" dirty="0" smtClean="0"/>
-                        <a:t>parent extent</a:t>
-                      </a:r>
-                      <a:endParaRPr lang="en-US" altLang="zh-CN" sz="1600" baseline="0" dirty="0" smtClean="0"/>
+                        <a:t>0x02 relation parent extent</a:t>
+                      </a:r>
                     </a:p>
                   </a:txBody>
                   <a:tcPr>
@@ -7536,14 +7599,14 @@
           <p:nvPr>
             <p:extLst>
               <p:ext uri="{D42A27DB-BD31-4B8C-83A1-F6EECF244321}">
-                <p14:modId xmlns:p14="http://schemas.microsoft.com/office/powerpoint/2010/main" val="3057480773"/>
+                <p14:modId xmlns:p14="http://schemas.microsoft.com/office/powerpoint/2010/main" val="3138858232"/>
               </p:ext>
             </p:extLst>
           </p:nvPr>
         </p:nvGraphicFramePr>
         <p:xfrm>
           <a:off x="838200" y="1400535"/>
-          <a:ext cx="6338104" cy="5292332"/>
+          <a:ext cx="6338104" cy="5627612"/>
         </p:xfrm>
         <a:graphic>
           <a:graphicData uri="http://schemas.openxmlformats.org/drawingml/2006/table">
@@ -8557,11 +8620,7 @@
                       </a:r>
                       <a:r>
                         <a:rPr lang="zh-CN" altLang="en-US" sz="1600" baseline="0" dirty="0" smtClean="0"/>
-                        <a:t>和</a:t>
-                      </a:r>
-                      <a:r>
-                        <a:rPr lang="zh-CN" altLang="en-US" sz="1600" baseline="0" dirty="0" smtClean="0"/>
-                        <a:t>偏移  </a:t>
+                        <a:t>和偏移  </a:t>
                       </a:r>
                       <a:endParaRPr lang="zh-CN" altLang="en-US" sz="1600" dirty="0"/>
                     </a:p>
@@ -8888,10 +8947,22 @@
                     <a:lstStyle/>
                     <a:p>
                       <a:r>
-                        <a:rPr lang="en-US" altLang="zh-CN" sz="1600" dirty="0" err="1" smtClean="0"/>
+                        <a:rPr lang="en-US" altLang="zh-CN" sz="1600" u="none" dirty="0" err="1" smtClean="0">
+                          <a:solidFill>
+                            <a:schemeClr val="bg2">
+                              <a:lumMod val="90000"/>
+                            </a:schemeClr>
+                          </a:solidFill>
+                        </a:rPr>
                         <a:t>clid</a:t>
                       </a:r>
-                      <a:endParaRPr lang="zh-CN" altLang="en-US" sz="1600" dirty="0"/>
+                      <a:endParaRPr lang="zh-CN" altLang="en-US" sz="1600" u="none" dirty="0">
+                        <a:solidFill>
+                          <a:schemeClr val="bg2">
+                            <a:lumMod val="90000"/>
+                          </a:schemeClr>
+                        </a:solidFill>
+                      </a:endParaRPr>
                     </a:p>
                   </a:txBody>
                   <a:tcPr>
@@ -8950,10 +9021,22 @@
                     <a:lstStyle/>
                     <a:p>
                       <a:r>
-                        <a:rPr lang="en-US" altLang="zh-CN" sz="1600" dirty="0" smtClean="0"/>
+                        <a:rPr lang="en-US" altLang="zh-CN" sz="1600" u="none" dirty="0" smtClean="0">
+                          <a:solidFill>
+                            <a:schemeClr val="bg2">
+                              <a:lumMod val="90000"/>
+                            </a:schemeClr>
+                          </a:solidFill>
+                        </a:rPr>
                         <a:t>UINT32</a:t>
                       </a:r>
-                      <a:endParaRPr lang="zh-CN" altLang="en-US" sz="1600" dirty="0"/>
+                      <a:endParaRPr lang="zh-CN" altLang="en-US" sz="1600" u="none" dirty="0">
+                        <a:solidFill>
+                          <a:schemeClr val="bg2">
+                            <a:lumMod val="90000"/>
+                          </a:schemeClr>
+                        </a:solidFill>
+                      </a:endParaRPr>
                     </a:p>
                   </a:txBody>
                   <a:tcPr>
@@ -9012,10 +9095,22 @@
                     <a:lstStyle/>
                     <a:p>
                       <a:r>
-                        <a:rPr lang="en-US" altLang="zh-CN" sz="1600" dirty="0" smtClean="0"/>
+                        <a:rPr lang="en-US" altLang="zh-CN" sz="1600" u="none" dirty="0" smtClean="0">
+                          <a:solidFill>
+                            <a:schemeClr val="bg2">
+                              <a:lumMod val="90000"/>
+                            </a:schemeClr>
+                          </a:solidFill>
+                        </a:rPr>
                         <a:t>4</a:t>
                       </a:r>
-                      <a:endParaRPr lang="zh-CN" altLang="en-US" sz="1600" dirty="0"/>
+                      <a:endParaRPr lang="zh-CN" altLang="en-US" sz="1600" u="none" dirty="0">
+                        <a:solidFill>
+                          <a:schemeClr val="bg2">
+                            <a:lumMod val="90000"/>
+                          </a:schemeClr>
+                        </a:solidFill>
+                      </a:endParaRPr>
                     </a:p>
                   </a:txBody>
                   <a:tcPr>
@@ -9073,7 +9168,43 @@
                     <a:bodyPr/>
                     <a:lstStyle/>
                     <a:p>
-                      <a:endParaRPr lang="zh-CN" altLang="en-US" sz="1600" dirty="0"/>
+                      <a:r>
+                        <a:rPr lang="en-US" altLang="zh-CN" sz="1600" u="none" dirty="0" smtClean="0">
+                          <a:solidFill>
+                            <a:schemeClr val="bg2">
+                              <a:lumMod val="90000"/>
+                            </a:schemeClr>
+                          </a:solidFill>
+                        </a:rPr>
+                        <a:t>CL</a:t>
+                      </a:r>
+                      <a:r>
+                        <a:rPr lang="zh-CN" altLang="en-US" sz="1600" u="none" dirty="0" smtClean="0">
+                          <a:solidFill>
+                            <a:schemeClr val="bg2">
+                              <a:lumMod val="90000"/>
+                            </a:schemeClr>
+                          </a:solidFill>
+                        </a:rPr>
+                        <a:t>逻辑</a:t>
+                      </a:r>
+                      <a:r>
+                        <a:rPr lang="en-US" altLang="zh-CN" sz="1600" u="none" dirty="0" smtClean="0">
+                          <a:solidFill>
+                            <a:schemeClr val="bg2">
+                              <a:lumMod val="90000"/>
+                            </a:schemeClr>
+                          </a:solidFill>
+                        </a:rPr>
+                        <a:t>ID</a:t>
+                      </a:r>
+                      <a:endParaRPr lang="zh-CN" altLang="en-US" sz="1600" u="none" dirty="0">
+                        <a:solidFill>
+                          <a:schemeClr val="bg2">
+                            <a:lumMod val="90000"/>
+                          </a:schemeClr>
+                        </a:solidFill>
+                      </a:endParaRPr>
                     </a:p>
                   </a:txBody>
                   <a:tcPr>
@@ -9129,6 +9260,261 @@
                 <a:extLst>
                   <a:ext uri="{0D108BD9-81ED-4DB2-BD59-A6C34878D82A}">
                     <a16:rowId xmlns:a16="http://schemas.microsoft.com/office/drawing/2014/main" val="984224458"/>
+                  </a:ext>
+                </a:extLst>
+              </a:tr>
+              <a:tr h="167640">
+                <a:tc>
+                  <a:txBody>
+                    <a:bodyPr/>
+                    <a:lstStyle/>
+                    <a:p>
+                      <a:r>
+                        <a:rPr lang="en-US" altLang="zh-CN" sz="1600" dirty="0" err="1" smtClean="0"/>
+                        <a:t>extentLogicID</a:t>
+                      </a:r>
+                      <a:endParaRPr lang="zh-CN" altLang="en-US" sz="1600" dirty="0"/>
+                    </a:p>
+                  </a:txBody>
+                  <a:tcPr>
+                    <a:lnL w="12700" cap="flat" cmpd="sng" algn="ctr">
+                      <a:solidFill>
+                        <a:schemeClr val="tx1"/>
+                      </a:solidFill>
+                      <a:prstDash val="solid"/>
+                      <a:round/>
+                      <a:headEnd type="none" w="med" len="med"/>
+                      <a:tailEnd type="none" w="med" len="med"/>
+                    </a:lnL>
+                    <a:lnR w="12700" cap="flat" cmpd="sng" algn="ctr">
+                      <a:solidFill>
+                        <a:schemeClr val="tx1"/>
+                      </a:solidFill>
+                      <a:prstDash val="solid"/>
+                      <a:round/>
+                      <a:headEnd type="none" w="med" len="med"/>
+                      <a:tailEnd type="none" w="med" len="med"/>
+                    </a:lnR>
+                    <a:lnT w="12700" cap="flat" cmpd="sng" algn="ctr">
+                      <a:solidFill>
+                        <a:schemeClr val="tx1"/>
+                      </a:solidFill>
+                      <a:prstDash val="solid"/>
+                      <a:round/>
+                      <a:headEnd type="none" w="med" len="med"/>
+                      <a:tailEnd type="none" w="med" len="med"/>
+                    </a:lnT>
+                    <a:lnB w="12700" cap="flat" cmpd="sng" algn="ctr">
+                      <a:solidFill>
+                        <a:schemeClr val="tx1"/>
+                      </a:solidFill>
+                      <a:prstDash val="solid"/>
+                      <a:round/>
+                      <a:headEnd type="none" w="med" len="med"/>
+                      <a:tailEnd type="none" w="med" len="med"/>
+                    </a:lnB>
+                    <a:lnTlToBr w="12700" cmpd="sng">
+                      <a:noFill/>
+                      <a:prstDash val="solid"/>
+                    </a:lnTlToBr>
+                    <a:lnBlToTr w="12700" cmpd="sng">
+                      <a:noFill/>
+                      <a:prstDash val="solid"/>
+                    </a:lnBlToTr>
+                    <a:solidFill>
+                      <a:schemeClr val="bg2"/>
+                    </a:solidFill>
+                  </a:tcPr>
+                </a:tc>
+                <a:tc>
+                  <a:txBody>
+                    <a:bodyPr/>
+                    <a:lstStyle/>
+                    <a:p>
+                      <a:r>
+                        <a:rPr lang="en-US" altLang="zh-CN" sz="1600" dirty="0" smtClean="0"/>
+                        <a:t>UINT32</a:t>
+                      </a:r>
+                      <a:endParaRPr lang="zh-CN" altLang="en-US" sz="1600" dirty="0"/>
+                    </a:p>
+                  </a:txBody>
+                  <a:tcPr>
+                    <a:lnL w="12700" cap="flat" cmpd="sng" algn="ctr">
+                      <a:solidFill>
+                        <a:schemeClr val="tx1"/>
+                      </a:solidFill>
+                      <a:prstDash val="solid"/>
+                      <a:round/>
+                      <a:headEnd type="none" w="med" len="med"/>
+                      <a:tailEnd type="none" w="med" len="med"/>
+                    </a:lnL>
+                    <a:lnR w="12700" cap="flat" cmpd="sng" algn="ctr">
+                      <a:solidFill>
+                        <a:schemeClr val="tx1"/>
+                      </a:solidFill>
+                      <a:prstDash val="solid"/>
+                      <a:round/>
+                      <a:headEnd type="none" w="med" len="med"/>
+                      <a:tailEnd type="none" w="med" len="med"/>
+                    </a:lnR>
+                    <a:lnT w="12700" cap="flat" cmpd="sng" algn="ctr">
+                      <a:solidFill>
+                        <a:schemeClr val="tx1"/>
+                      </a:solidFill>
+                      <a:prstDash val="solid"/>
+                      <a:round/>
+                      <a:headEnd type="none" w="med" len="med"/>
+                      <a:tailEnd type="none" w="med" len="med"/>
+                    </a:lnT>
+                    <a:lnB w="12700" cap="flat" cmpd="sng" algn="ctr">
+                      <a:solidFill>
+                        <a:schemeClr val="tx1"/>
+                      </a:solidFill>
+                      <a:prstDash val="solid"/>
+                      <a:round/>
+                      <a:headEnd type="none" w="med" len="med"/>
+                      <a:tailEnd type="none" w="med" len="med"/>
+                    </a:lnB>
+                    <a:lnTlToBr w="12700" cmpd="sng">
+                      <a:noFill/>
+                      <a:prstDash val="solid"/>
+                    </a:lnTlToBr>
+                    <a:lnBlToTr w="12700" cmpd="sng">
+                      <a:noFill/>
+                      <a:prstDash val="solid"/>
+                    </a:lnBlToTr>
+                    <a:solidFill>
+                      <a:schemeClr val="bg2"/>
+                    </a:solidFill>
+                  </a:tcPr>
+                </a:tc>
+                <a:tc>
+                  <a:txBody>
+                    <a:bodyPr/>
+                    <a:lstStyle/>
+                    <a:p>
+                      <a:r>
+                        <a:rPr lang="en-US" altLang="zh-CN" sz="1600" dirty="0" smtClean="0"/>
+                        <a:t>4</a:t>
+                      </a:r>
+                      <a:endParaRPr lang="zh-CN" altLang="en-US" sz="1600" dirty="0"/>
+                    </a:p>
+                  </a:txBody>
+                  <a:tcPr>
+                    <a:lnL w="12700" cap="flat" cmpd="sng" algn="ctr">
+                      <a:solidFill>
+                        <a:schemeClr val="tx1"/>
+                      </a:solidFill>
+                      <a:prstDash val="solid"/>
+                      <a:round/>
+                      <a:headEnd type="none" w="med" len="med"/>
+                      <a:tailEnd type="none" w="med" len="med"/>
+                    </a:lnL>
+                    <a:lnR w="12700" cap="flat" cmpd="sng" algn="ctr">
+                      <a:solidFill>
+                        <a:schemeClr val="tx1"/>
+                      </a:solidFill>
+                      <a:prstDash val="solid"/>
+                      <a:round/>
+                      <a:headEnd type="none" w="med" len="med"/>
+                      <a:tailEnd type="none" w="med" len="med"/>
+                    </a:lnR>
+                    <a:lnT w="12700" cap="flat" cmpd="sng" algn="ctr">
+                      <a:solidFill>
+                        <a:schemeClr val="tx1"/>
+                      </a:solidFill>
+                      <a:prstDash val="solid"/>
+                      <a:round/>
+                      <a:headEnd type="none" w="med" len="med"/>
+                      <a:tailEnd type="none" w="med" len="med"/>
+                    </a:lnT>
+                    <a:lnB w="12700" cap="flat" cmpd="sng" algn="ctr">
+                      <a:solidFill>
+                        <a:schemeClr val="tx1"/>
+                      </a:solidFill>
+                      <a:prstDash val="solid"/>
+                      <a:round/>
+                      <a:headEnd type="none" w="med" len="med"/>
+                      <a:tailEnd type="none" w="med" len="med"/>
+                    </a:lnB>
+                    <a:lnTlToBr w="12700" cmpd="sng">
+                      <a:noFill/>
+                      <a:prstDash val="solid"/>
+                    </a:lnTlToBr>
+                    <a:lnBlToTr w="12700" cmpd="sng">
+                      <a:noFill/>
+                      <a:prstDash val="solid"/>
+                    </a:lnBlToTr>
+                    <a:solidFill>
+                      <a:schemeClr val="bg2"/>
+                    </a:solidFill>
+                  </a:tcPr>
+                </a:tc>
+                <a:tc>
+                  <a:txBody>
+                    <a:bodyPr/>
+                    <a:lstStyle/>
+                    <a:p>
+                      <a:r>
+                        <a:rPr lang="en-US" altLang="zh-CN" sz="1600" dirty="0" smtClean="0"/>
+                        <a:t>extent</a:t>
+                      </a:r>
+                      <a:endParaRPr lang="zh-CN" altLang="en-US" sz="1600" dirty="0"/>
+                    </a:p>
+                  </a:txBody>
+                  <a:tcPr>
+                    <a:lnL w="12700" cap="flat" cmpd="sng" algn="ctr">
+                      <a:solidFill>
+                        <a:schemeClr val="tx1"/>
+                      </a:solidFill>
+                      <a:prstDash val="solid"/>
+                      <a:round/>
+                      <a:headEnd type="none" w="med" len="med"/>
+                      <a:tailEnd type="none" w="med" len="med"/>
+                    </a:lnL>
+                    <a:lnR w="12700" cap="flat" cmpd="sng" algn="ctr">
+                      <a:solidFill>
+                        <a:schemeClr val="tx1"/>
+                      </a:solidFill>
+                      <a:prstDash val="solid"/>
+                      <a:round/>
+                      <a:headEnd type="none" w="med" len="med"/>
+                      <a:tailEnd type="none" w="med" len="med"/>
+                    </a:lnR>
+                    <a:lnT w="12700" cap="flat" cmpd="sng" algn="ctr">
+                      <a:solidFill>
+                        <a:schemeClr val="tx1"/>
+                      </a:solidFill>
+                      <a:prstDash val="solid"/>
+                      <a:round/>
+                      <a:headEnd type="none" w="med" len="med"/>
+                      <a:tailEnd type="none" w="med" len="med"/>
+                    </a:lnT>
+                    <a:lnB w="12700" cap="flat" cmpd="sng" algn="ctr">
+                      <a:solidFill>
+                        <a:schemeClr val="tx1"/>
+                      </a:solidFill>
+                      <a:prstDash val="solid"/>
+                      <a:round/>
+                      <a:headEnd type="none" w="med" len="med"/>
+                      <a:tailEnd type="none" w="med" len="med"/>
+                    </a:lnB>
+                    <a:lnTlToBr w="12700" cmpd="sng">
+                      <a:noFill/>
+                      <a:prstDash val="solid"/>
+                    </a:lnTlToBr>
+                    <a:lnBlToTr w="12700" cmpd="sng">
+                      <a:noFill/>
+                      <a:prstDash val="solid"/>
+                    </a:lnBlToTr>
+                    <a:solidFill>
+                      <a:schemeClr val="bg2"/>
+                    </a:solidFill>
+                  </a:tcPr>
+                </a:tc>
+                <a:extLst>
+                  <a:ext uri="{0D108BD9-81ED-4DB2-BD59-A6C34878D82A}">
+                    <a16:rowId xmlns:a16="http://schemas.microsoft.com/office/drawing/2014/main" val="1519560635"/>
                   </a:ext>
                 </a:extLst>
               </a:tr>
@@ -12962,11 +13348,7 @@
                       </a:r>
                       <a:r>
                         <a:rPr lang="zh-CN" altLang="en-US" sz="1600" dirty="0" smtClean="0"/>
-                        <a:t>中</a:t>
-                      </a:r>
-                      <a:r>
-                        <a:rPr lang="zh-CN" altLang="en-US" sz="1600" dirty="0" smtClean="0"/>
-                        <a:t>的下标</a:t>
+                        <a:t>中的下标</a:t>
                       </a:r>
                       <a:endParaRPr lang="zh-CN" altLang="en-US" sz="1600" dirty="0"/>
                     </a:p>
@@ -13263,11 +13645,7 @@
                       </a:r>
                       <a:r>
                         <a:rPr lang="en-US" altLang="zh-CN" sz="1600" baseline="0" dirty="0" smtClean="0"/>
-                        <a:t>relation extent </a:t>
-                      </a:r>
-                      <a:r>
-                        <a:rPr lang="en-US" altLang="zh-CN" sz="1600" baseline="0" dirty="0" smtClean="0"/>
-                        <a:t>parent</a:t>
+                        <a:t>relation extent parent</a:t>
                       </a:r>
                       <a:r>
                         <a:rPr lang="zh-CN" altLang="en-US" sz="1600" baseline="0" dirty="0" smtClean="0"/>
@@ -13301,19 +13679,11 @@
                       </a:r>
                       <a:r>
                         <a:rPr lang="en-US" altLang="zh-CN" sz="1600" baseline="0" dirty="0" smtClean="0"/>
-                        <a:t>relation extent </a:t>
-                      </a:r>
-                      <a:r>
-                        <a:rPr lang="en-US" altLang="zh-CN" sz="1600" baseline="0" dirty="0" smtClean="0"/>
-                        <a:t>parent</a:t>
+                        <a:t>relation extent parent</a:t>
                       </a:r>
                       <a:r>
                         <a:rPr lang="zh-CN" altLang="en-US" sz="1600" baseline="0" dirty="0" smtClean="0"/>
-                        <a:t>时</a:t>
-                      </a:r>
-                      <a:r>
-                        <a:rPr lang="zh-CN" altLang="en-US" sz="1600" baseline="0" dirty="0" smtClean="0"/>
-                        <a:t>，均表示</a:t>
+                        <a:t>时，均表示</a:t>
                       </a:r>
                       <a:r>
                         <a:rPr lang="en-US" altLang="zh-CN" sz="1600" baseline="0" dirty="0" smtClean="0"/>
@@ -13567,42 +13937,6 @@
           </a:p>
         </p:txBody>
       </p:sp>
-      <p:cxnSp>
-        <p:nvCxnSpPr>
-          <p:cNvPr id="15" name="曲线连接符 14"/>
-          <p:cNvCxnSpPr>
-            <a:stCxn id="5" idx="3"/>
-            <a:endCxn id="13" idx="1"/>
-          </p:cNvCxnSpPr>
-          <p:nvPr/>
-        </p:nvCxnSpPr>
-        <p:spPr>
-          <a:xfrm>
-            <a:off x="8899301" y="2646608"/>
-            <a:ext cx="564662" cy="12700"/>
-          </a:xfrm>
-          <a:prstGeom prst="curvedConnector3">
-            <a:avLst/>
-          </a:prstGeom>
-          <a:ln>
-            <a:tailEnd type="triangle"/>
-          </a:ln>
-        </p:spPr>
-        <p:style>
-          <a:lnRef idx="1">
-            <a:schemeClr val="accent1"/>
-          </a:lnRef>
-          <a:fillRef idx="0">
-            <a:schemeClr val="accent1"/>
-          </a:fillRef>
-          <a:effectRef idx="0">
-            <a:schemeClr val="accent1"/>
-          </a:effectRef>
-          <a:fontRef idx="minor">
-            <a:schemeClr val="tx1"/>
-          </a:fontRef>
-        </p:style>
-      </p:cxnSp>
       <p:sp>
         <p:nvSpPr>
           <p:cNvPr id="17" name="矩形 16"/>
@@ -13753,6 +14087,7 @@
             <a:avLst/>
           </a:prstGeom>
           <a:ln>
+            <a:headEnd type="triangle"/>
             <a:tailEnd type="triangle"/>
           </a:ln>
         </p:spPr>
@@ -13789,6 +14124,7 @@
             <a:avLst/>
           </a:prstGeom>
           <a:ln>
+            <a:headEnd type="triangle"/>
             <a:tailEnd type="triangle"/>
           </a:ln>
         </p:spPr>
@@ -13825,6 +14161,7 @@
             <a:avLst/>
           </a:prstGeom>
           <a:ln>
+            <a:headEnd type="triangle"/>
             <a:tailEnd type="triangle"/>
           </a:ln>
         </p:spPr>
@@ -13865,6 +14202,7 @@
             </a:avLst>
           </a:prstGeom>
           <a:ln>
+            <a:headEnd type="triangle"/>
             <a:tailEnd type="triangle"/>
           </a:ln>
         </p:spPr>
@@ -14081,6 +14419,13 @@
   <p:clrMapOvr>
     <a:masterClrMapping/>
   </p:clrMapOvr>
+  <p:timing>
+    <p:tnLst>
+      <p:par>
+        <p:cTn id="1" dur="indefinite" restart="never" nodeType="tmRoot"/>
+      </p:par>
+    </p:tnLst>
+  </p:timing>
 </p:sld>
 </file>
 
@@ -14863,7 +15208,7 @@
           <p:nvPr>
             <p:extLst>
               <p:ext uri="{D42A27DB-BD31-4B8C-83A1-F6EECF244321}">
-                <p14:modId xmlns:p14="http://schemas.microsoft.com/office/powerpoint/2010/main" val="1666897764"/>
+                <p14:modId xmlns:p14="http://schemas.microsoft.com/office/powerpoint/2010/main" val="3431509671"/>
               </p:ext>
             </p:extLst>
           </p:nvPr>
@@ -14958,7 +15303,15 @@
                     <a:p>
                       <a:r>
                         <a:rPr lang="en-US" altLang="zh-CN" sz="1600" dirty="0" smtClean="0"/>
-                        <a:t>(0,4k)</a:t>
+                        <a:t>(</a:t>
+                      </a:r>
+                      <a:r>
+                        <a:rPr lang="en-US" altLang="zh-CN" sz="1600" dirty="0" smtClean="0"/>
+                        <a:t>0,4k</a:t>
+                      </a:r>
+                      <a:r>
+                        <a:rPr lang="en-US" altLang="zh-CN" sz="1600" dirty="0" smtClean="0"/>
+                        <a:t>)</a:t>
                       </a:r>
                       <a:endParaRPr lang="zh-CN" altLang="en-US" sz="1600" dirty="0"/>
                     </a:p>
@@ -14972,7 +15325,11 @@
                     <a:p>
                       <a:r>
                         <a:rPr lang="en-US" altLang="zh-CN" sz="1600" dirty="0" smtClean="0"/>
-                        <a:t>[4k,64k)</a:t>
+                        <a:t>[4k,64k</a:t>
+                      </a:r>
+                      <a:r>
+                        <a:rPr lang="en-US" altLang="zh-CN" sz="1600" dirty="0" smtClean="0"/>
+                        <a:t>)</a:t>
                       </a:r>
                       <a:endParaRPr lang="zh-CN" altLang="en-US" sz="1600" dirty="0"/>
                     </a:p>
@@ -15020,10 +15377,18 @@
                     <a:lstStyle/>
                     <a:p>
                       <a:r>
-                        <a:rPr lang="en-US" altLang="zh-CN" dirty="0" smtClean="0"/>
+                        <a:rPr lang="en-US" altLang="zh-CN" dirty="0" smtClean="0">
+                          <a:solidFill>
+                            <a:schemeClr val="tx1"/>
+                          </a:solidFill>
+                        </a:rPr>
                         <a:t>4k</a:t>
                       </a:r>
-                      <a:endParaRPr lang="zh-CN" altLang="en-US" dirty="0"/>
+                      <a:endParaRPr lang="zh-CN" altLang="en-US" dirty="0">
+                        <a:solidFill>
+                          <a:schemeClr val="tx1"/>
+                        </a:solidFill>
+                      </a:endParaRPr>
                     </a:p>
                   </a:txBody>
                   <a:tcPr/>
@@ -15034,10 +15399,18 @@
                     <a:lstStyle/>
                     <a:p>
                       <a:r>
-                        <a:rPr lang="en-US" altLang="zh-CN" dirty="0" smtClean="0"/>
-                        <a:t>1</a:t>
-                      </a:r>
-                      <a:endParaRPr lang="zh-CN" altLang="en-US" dirty="0"/>
+                        <a:rPr lang="en-US" altLang="zh-CN" dirty="0" smtClean="0">
+                          <a:solidFill>
+                            <a:srgbClr val="FF0000"/>
+                          </a:solidFill>
+                        </a:rPr>
+                        <a:t>4k</a:t>
+                      </a:r>
+                      <a:endParaRPr lang="zh-CN" altLang="en-US" dirty="0">
+                        <a:solidFill>
+                          <a:srgbClr val="FF0000"/>
+                        </a:solidFill>
+                      </a:endParaRPr>
                     </a:p>
                   </a:txBody>
                   <a:tcPr/>
@@ -15048,10 +15421,18 @@
                     <a:lstStyle/>
                     <a:p>
                       <a:r>
-                        <a:rPr lang="en-US" altLang="zh-CN" dirty="0" smtClean="0"/>
-                        <a:t>64</a:t>
-                      </a:r>
-                      <a:endParaRPr lang="zh-CN" altLang="en-US" dirty="0"/>
+                        <a:rPr lang="en-US" altLang="zh-CN" dirty="0" smtClean="0">
+                          <a:solidFill>
+                            <a:srgbClr val="FF0000"/>
+                          </a:solidFill>
+                        </a:rPr>
+                        <a:t>512K</a:t>
+                      </a:r>
+                      <a:endParaRPr lang="zh-CN" altLang="en-US" dirty="0">
+                        <a:solidFill>
+                          <a:srgbClr val="FF0000"/>
+                        </a:solidFill>
+                      </a:endParaRPr>
                     </a:p>
                   </a:txBody>
                   <a:tcPr/>
@@ -15062,10 +15443,18 @@
                     <a:lstStyle/>
                     <a:p>
                       <a:r>
-                        <a:rPr lang="en-US" altLang="zh-CN" dirty="0" smtClean="0"/>
-                        <a:t>1k</a:t>
-                      </a:r>
-                      <a:endParaRPr lang="zh-CN" altLang="en-US" dirty="0"/>
+                        <a:rPr lang="en-US" altLang="zh-CN" dirty="0" smtClean="0">
+                          <a:solidFill>
+                            <a:srgbClr val="FF0000"/>
+                          </a:solidFill>
+                        </a:rPr>
+                        <a:t>2M</a:t>
+                      </a:r>
+                      <a:endParaRPr lang="zh-CN" altLang="en-US" dirty="0">
+                        <a:solidFill>
+                          <a:srgbClr val="FF0000"/>
+                        </a:solidFill>
+                      </a:endParaRPr>
                     </a:p>
                   </a:txBody>
                   <a:tcPr/>
@@ -15076,10 +15465,18 @@
                     <a:lstStyle/>
                     <a:p>
                       <a:r>
-                        <a:rPr lang="en-US" altLang="zh-CN" dirty="0" smtClean="0"/>
-                        <a:t>4k</a:t>
-                      </a:r>
-                      <a:endParaRPr lang="zh-CN" altLang="en-US" dirty="0"/>
+                        <a:rPr lang="en-US" altLang="zh-CN" dirty="0" smtClean="0">
+                          <a:solidFill>
+                            <a:srgbClr val="FF0000"/>
+                          </a:solidFill>
+                        </a:rPr>
+                        <a:t>16M</a:t>
+                      </a:r>
+                      <a:endParaRPr lang="zh-CN" altLang="en-US" dirty="0">
+                        <a:solidFill>
+                          <a:srgbClr val="FF0000"/>
+                        </a:solidFill>
+                      </a:endParaRPr>
                     </a:p>
                   </a:txBody>
                   <a:tcPr/>
@@ -15097,10 +15494,18 @@
                     <a:lstStyle/>
                     <a:p>
                       <a:r>
-                        <a:rPr lang="en-US" altLang="zh-CN" dirty="0" smtClean="0"/>
+                        <a:rPr lang="en-US" altLang="zh-CN" dirty="0" smtClean="0">
+                          <a:solidFill>
+                            <a:schemeClr val="tx1"/>
+                          </a:solidFill>
+                        </a:rPr>
                         <a:t>8k</a:t>
                       </a:r>
-                      <a:endParaRPr lang="zh-CN" altLang="en-US" dirty="0"/>
+                      <a:endParaRPr lang="zh-CN" altLang="en-US" dirty="0">
+                        <a:solidFill>
+                          <a:schemeClr val="tx1"/>
+                        </a:solidFill>
+                      </a:endParaRPr>
                     </a:p>
                   </a:txBody>
                   <a:tcPr/>
@@ -15111,10 +15516,18 @@
                     <a:lstStyle/>
                     <a:p>
                       <a:r>
-                        <a:rPr lang="en-US" altLang="zh-CN" dirty="0" smtClean="0"/>
-                        <a:t>1</a:t>
-                      </a:r>
-                      <a:endParaRPr lang="zh-CN" altLang="en-US" dirty="0"/>
+                        <a:rPr lang="en-US" altLang="zh-CN" dirty="0" smtClean="0">
+                          <a:solidFill>
+                            <a:srgbClr val="FF0000"/>
+                          </a:solidFill>
+                        </a:rPr>
+                        <a:t>8k</a:t>
+                      </a:r>
+                      <a:endParaRPr lang="zh-CN" altLang="en-US" dirty="0">
+                        <a:solidFill>
+                          <a:schemeClr val="bg2"/>
+                        </a:solidFill>
+                      </a:endParaRPr>
                     </a:p>
                   </a:txBody>
                   <a:tcPr/>
@@ -15125,10 +15538,18 @@
                     <a:lstStyle/>
                     <a:p>
                       <a:r>
-                        <a:rPr lang="en-US" altLang="zh-CN" dirty="0" smtClean="0"/>
-                        <a:t>32</a:t>
-                      </a:r>
-                      <a:endParaRPr lang="zh-CN" altLang="en-US" dirty="0"/>
+                        <a:rPr lang="en-US" altLang="zh-CN" dirty="0" smtClean="0">
+                          <a:solidFill>
+                            <a:srgbClr val="FF0000"/>
+                          </a:solidFill>
+                        </a:rPr>
+                        <a:t>512K</a:t>
+                      </a:r>
+                      <a:endParaRPr lang="zh-CN" altLang="en-US" dirty="0">
+                        <a:solidFill>
+                          <a:srgbClr val="FF0000"/>
+                        </a:solidFill>
+                      </a:endParaRPr>
                     </a:p>
                   </a:txBody>
                   <a:tcPr/>
@@ -15139,10 +15560,18 @@
                     <a:lstStyle/>
                     <a:p>
                       <a:r>
-                        <a:rPr lang="en-US" altLang="zh-CN" dirty="0" smtClean="0"/>
-                        <a:t>512</a:t>
-                      </a:r>
-                      <a:endParaRPr lang="zh-CN" altLang="en-US" dirty="0"/>
+                        <a:rPr lang="en-US" altLang="zh-CN" dirty="0" smtClean="0">
+                          <a:solidFill>
+                            <a:srgbClr val="FF0000"/>
+                          </a:solidFill>
+                        </a:rPr>
+                        <a:t>2M</a:t>
+                      </a:r>
+                      <a:endParaRPr lang="zh-CN" altLang="en-US" dirty="0">
+                        <a:solidFill>
+                          <a:srgbClr val="FF0000"/>
+                        </a:solidFill>
+                      </a:endParaRPr>
                     </a:p>
                   </a:txBody>
                   <a:tcPr/>
@@ -15153,10 +15582,18 @@
                     <a:lstStyle/>
                     <a:p>
                       <a:r>
-                        <a:rPr lang="en-US" altLang="zh-CN" dirty="0" smtClean="0"/>
-                        <a:t>2k</a:t>
-                      </a:r>
-                      <a:endParaRPr lang="zh-CN" altLang="en-US" dirty="0"/>
+                        <a:rPr lang="en-US" altLang="zh-CN" dirty="0" smtClean="0">
+                          <a:solidFill>
+                            <a:srgbClr val="FF0000"/>
+                          </a:solidFill>
+                        </a:rPr>
+                        <a:t>16M</a:t>
+                      </a:r>
+                      <a:endParaRPr lang="zh-CN" altLang="en-US" dirty="0">
+                        <a:solidFill>
+                          <a:srgbClr val="FF0000"/>
+                        </a:solidFill>
+                      </a:endParaRPr>
                     </a:p>
                   </a:txBody>
                   <a:tcPr/>
@@ -15174,10 +15611,18 @@
                     <a:lstStyle/>
                     <a:p>
                       <a:r>
-                        <a:rPr lang="en-US" altLang="zh-CN" dirty="0" smtClean="0"/>
+                        <a:rPr lang="en-US" altLang="zh-CN" dirty="0" smtClean="0">
+                          <a:solidFill>
+                            <a:schemeClr val="tx1"/>
+                          </a:solidFill>
+                        </a:rPr>
                         <a:t>16k</a:t>
                       </a:r>
-                      <a:endParaRPr lang="zh-CN" altLang="en-US" dirty="0"/>
+                      <a:endParaRPr lang="zh-CN" altLang="en-US" dirty="0">
+                        <a:solidFill>
+                          <a:schemeClr val="tx1"/>
+                        </a:solidFill>
+                      </a:endParaRPr>
                     </a:p>
                   </a:txBody>
                   <a:tcPr/>
@@ -15188,10 +15633,18 @@
                     <a:lstStyle/>
                     <a:p>
                       <a:r>
-                        <a:rPr lang="en-US" altLang="zh-CN" dirty="0" smtClean="0"/>
-                        <a:t>1</a:t>
-                      </a:r>
-                      <a:endParaRPr lang="zh-CN" altLang="en-US" dirty="0"/>
+                        <a:rPr lang="en-US" altLang="zh-CN" dirty="0" smtClean="0">
+                          <a:solidFill>
+                            <a:srgbClr val="FF0000"/>
+                          </a:solidFill>
+                        </a:rPr>
+                        <a:t>16k</a:t>
+                      </a:r>
+                      <a:endParaRPr lang="zh-CN" altLang="en-US" dirty="0">
+                        <a:solidFill>
+                          <a:schemeClr val="bg2"/>
+                        </a:solidFill>
+                      </a:endParaRPr>
                     </a:p>
                   </a:txBody>
                   <a:tcPr/>
@@ -15202,10 +15655,18 @@
                     <a:lstStyle/>
                     <a:p>
                       <a:r>
-                        <a:rPr lang="en-US" altLang="zh-CN" dirty="0" smtClean="0"/>
-                        <a:t>16</a:t>
-                      </a:r>
-                      <a:endParaRPr lang="zh-CN" altLang="en-US" dirty="0"/>
+                        <a:rPr lang="en-US" altLang="zh-CN" dirty="0" smtClean="0">
+                          <a:solidFill>
+                            <a:srgbClr val="FF0000"/>
+                          </a:solidFill>
+                        </a:rPr>
+                        <a:t>512K</a:t>
+                      </a:r>
+                      <a:endParaRPr lang="zh-CN" altLang="en-US" dirty="0">
+                        <a:solidFill>
+                          <a:srgbClr val="FF0000"/>
+                        </a:solidFill>
+                      </a:endParaRPr>
                     </a:p>
                   </a:txBody>
                   <a:tcPr/>
@@ -15216,10 +15677,18 @@
                     <a:lstStyle/>
                     <a:p>
                       <a:r>
-                        <a:rPr lang="en-US" altLang="zh-CN" dirty="0" smtClean="0"/>
-                        <a:t>256</a:t>
-                      </a:r>
-                      <a:endParaRPr lang="zh-CN" altLang="en-US" dirty="0"/>
+                        <a:rPr lang="en-US" altLang="zh-CN" dirty="0" smtClean="0">
+                          <a:solidFill>
+                            <a:srgbClr val="FF0000"/>
+                          </a:solidFill>
+                        </a:rPr>
+                        <a:t>2M</a:t>
+                      </a:r>
+                      <a:endParaRPr lang="zh-CN" altLang="en-US" dirty="0">
+                        <a:solidFill>
+                          <a:srgbClr val="FF0000"/>
+                        </a:solidFill>
+                      </a:endParaRPr>
                     </a:p>
                   </a:txBody>
                   <a:tcPr/>
@@ -15230,10 +15699,18 @@
                     <a:lstStyle/>
                     <a:p>
                       <a:r>
-                        <a:rPr lang="en-US" altLang="zh-CN" dirty="0" smtClean="0"/>
-                        <a:t>1k</a:t>
-                      </a:r>
-                      <a:endParaRPr lang="zh-CN" altLang="en-US" dirty="0"/>
+                        <a:rPr lang="en-US" altLang="zh-CN" dirty="0" smtClean="0">
+                          <a:solidFill>
+                            <a:srgbClr val="FF0000"/>
+                          </a:solidFill>
+                        </a:rPr>
+                        <a:t>16M</a:t>
+                      </a:r>
+                      <a:endParaRPr lang="zh-CN" altLang="en-US" dirty="0">
+                        <a:solidFill>
+                          <a:srgbClr val="FF0000"/>
+                        </a:solidFill>
+                      </a:endParaRPr>
                     </a:p>
                   </a:txBody>
                   <a:tcPr/>
@@ -15251,10 +15728,18 @@
                     <a:lstStyle/>
                     <a:p>
                       <a:r>
-                        <a:rPr lang="en-US" altLang="zh-CN" dirty="0" smtClean="0"/>
+                        <a:rPr lang="en-US" altLang="zh-CN" dirty="0" smtClean="0">
+                          <a:solidFill>
+                            <a:schemeClr val="tx1"/>
+                          </a:solidFill>
+                        </a:rPr>
                         <a:t>32k</a:t>
                       </a:r>
-                      <a:endParaRPr lang="zh-CN" altLang="en-US" dirty="0"/>
+                      <a:endParaRPr lang="zh-CN" altLang="en-US" dirty="0">
+                        <a:solidFill>
+                          <a:schemeClr val="tx1"/>
+                        </a:solidFill>
+                      </a:endParaRPr>
                     </a:p>
                   </a:txBody>
                   <a:tcPr/>
@@ -15265,10 +15750,18 @@
                     <a:lstStyle/>
                     <a:p>
                       <a:r>
-                        <a:rPr lang="en-US" altLang="zh-CN" dirty="0" smtClean="0"/>
-                        <a:t>1</a:t>
-                      </a:r>
-                      <a:endParaRPr lang="zh-CN" altLang="en-US" dirty="0"/>
+                        <a:rPr lang="en-US" altLang="zh-CN" dirty="0" smtClean="0">
+                          <a:solidFill>
+                            <a:srgbClr val="FF0000"/>
+                          </a:solidFill>
+                        </a:rPr>
+                        <a:t>32k</a:t>
+                      </a:r>
+                      <a:endParaRPr lang="zh-CN" altLang="en-US" dirty="0">
+                        <a:solidFill>
+                          <a:schemeClr val="bg2"/>
+                        </a:solidFill>
+                      </a:endParaRPr>
                     </a:p>
                   </a:txBody>
                   <a:tcPr/>
@@ -15279,10 +15772,18 @@
                     <a:lstStyle/>
                     <a:p>
                       <a:r>
-                        <a:rPr lang="en-US" altLang="zh-CN" dirty="0" smtClean="0"/>
-                        <a:t>8</a:t>
-                      </a:r>
-                      <a:endParaRPr lang="zh-CN" altLang="en-US" dirty="0"/>
+                        <a:rPr lang="en-US" altLang="zh-CN" dirty="0" smtClean="0">
+                          <a:solidFill>
+                            <a:srgbClr val="FF0000"/>
+                          </a:solidFill>
+                        </a:rPr>
+                        <a:t>512K</a:t>
+                      </a:r>
+                      <a:endParaRPr lang="zh-CN" altLang="en-US" dirty="0">
+                        <a:solidFill>
+                          <a:srgbClr val="FF0000"/>
+                        </a:solidFill>
+                      </a:endParaRPr>
                     </a:p>
                   </a:txBody>
                   <a:tcPr/>
@@ -15293,10 +15794,18 @@
                     <a:lstStyle/>
                     <a:p>
                       <a:r>
-                        <a:rPr lang="en-US" altLang="zh-CN" dirty="0" smtClean="0"/>
-                        <a:t>128</a:t>
-                      </a:r>
-                      <a:endParaRPr lang="zh-CN" altLang="en-US" dirty="0"/>
+                        <a:rPr lang="en-US" altLang="zh-CN" dirty="0" smtClean="0">
+                          <a:solidFill>
+                            <a:srgbClr val="FF0000"/>
+                          </a:solidFill>
+                        </a:rPr>
+                        <a:t>2M</a:t>
+                      </a:r>
+                      <a:endParaRPr lang="zh-CN" altLang="en-US" dirty="0">
+                        <a:solidFill>
+                          <a:srgbClr val="FF0000"/>
+                        </a:solidFill>
+                      </a:endParaRPr>
                     </a:p>
                   </a:txBody>
                   <a:tcPr/>
@@ -15307,10 +15816,18 @@
                     <a:lstStyle/>
                     <a:p>
                       <a:r>
-                        <a:rPr lang="en-US" altLang="zh-CN" dirty="0" smtClean="0"/>
-                        <a:t>512</a:t>
-                      </a:r>
-                      <a:endParaRPr lang="zh-CN" altLang="en-US" dirty="0"/>
+                        <a:rPr lang="en-US" altLang="zh-CN" dirty="0" smtClean="0">
+                          <a:solidFill>
+                            <a:srgbClr val="FF0000"/>
+                          </a:solidFill>
+                        </a:rPr>
+                        <a:t>16M</a:t>
+                      </a:r>
+                      <a:endParaRPr lang="zh-CN" altLang="en-US" dirty="0">
+                        <a:solidFill>
+                          <a:srgbClr val="FF0000"/>
+                        </a:solidFill>
+                      </a:endParaRPr>
                     </a:p>
                   </a:txBody>
                   <a:tcPr/>
@@ -15328,10 +15845,18 @@
                     <a:lstStyle/>
                     <a:p>
                       <a:r>
-                        <a:rPr lang="en-US" altLang="zh-CN" dirty="0" smtClean="0"/>
+                        <a:rPr lang="en-US" altLang="zh-CN" dirty="0" smtClean="0">
+                          <a:solidFill>
+                            <a:schemeClr val="tx1"/>
+                          </a:solidFill>
+                        </a:rPr>
                         <a:t>64k</a:t>
                       </a:r>
-                      <a:endParaRPr lang="zh-CN" altLang="en-US" dirty="0"/>
+                      <a:endParaRPr lang="zh-CN" altLang="en-US" dirty="0">
+                        <a:solidFill>
+                          <a:schemeClr val="tx1"/>
+                        </a:solidFill>
+                      </a:endParaRPr>
                     </a:p>
                   </a:txBody>
                   <a:tcPr/>
@@ -15342,10 +15867,18 @@
                     <a:lstStyle/>
                     <a:p>
                       <a:r>
-                        <a:rPr lang="en-US" altLang="zh-CN" dirty="0" smtClean="0"/>
-                        <a:t>1</a:t>
-                      </a:r>
-                      <a:endParaRPr lang="zh-CN" altLang="en-US" dirty="0"/>
+                        <a:rPr lang="en-US" altLang="zh-CN" dirty="0" smtClean="0">
+                          <a:solidFill>
+                            <a:srgbClr val="FF0000"/>
+                          </a:solidFill>
+                        </a:rPr>
+                        <a:t>64k</a:t>
+                      </a:r>
+                      <a:endParaRPr lang="zh-CN" altLang="en-US" dirty="0">
+                        <a:solidFill>
+                          <a:schemeClr val="bg2"/>
+                        </a:solidFill>
+                      </a:endParaRPr>
                     </a:p>
                   </a:txBody>
                   <a:tcPr/>
@@ -15356,10 +15889,18 @@
                     <a:lstStyle/>
                     <a:p>
                       <a:r>
-                        <a:rPr lang="en-US" altLang="zh-CN" dirty="0" smtClean="0"/>
-                        <a:t>4</a:t>
-                      </a:r>
-                      <a:endParaRPr lang="zh-CN" altLang="en-US" dirty="0"/>
+                        <a:rPr lang="en-US" altLang="zh-CN" dirty="0" smtClean="0">
+                          <a:solidFill>
+                            <a:srgbClr val="FF0000"/>
+                          </a:solidFill>
+                        </a:rPr>
+                        <a:t>512K</a:t>
+                      </a:r>
+                      <a:endParaRPr lang="zh-CN" altLang="en-US" dirty="0">
+                        <a:solidFill>
+                          <a:srgbClr val="FF0000"/>
+                        </a:solidFill>
+                      </a:endParaRPr>
                     </a:p>
                   </a:txBody>
                   <a:tcPr/>
@@ -15370,10 +15911,18 @@
                     <a:lstStyle/>
                     <a:p>
                       <a:r>
-                        <a:rPr lang="en-US" altLang="zh-CN" dirty="0" smtClean="0"/>
-                        <a:t>64</a:t>
-                      </a:r>
-                      <a:endParaRPr lang="zh-CN" altLang="en-US" dirty="0"/>
+                        <a:rPr lang="en-US" altLang="zh-CN" dirty="0" smtClean="0">
+                          <a:solidFill>
+                            <a:srgbClr val="FF0000"/>
+                          </a:solidFill>
+                        </a:rPr>
+                        <a:t>2M</a:t>
+                      </a:r>
+                      <a:endParaRPr lang="zh-CN" altLang="en-US" dirty="0">
+                        <a:solidFill>
+                          <a:srgbClr val="FF0000"/>
+                        </a:solidFill>
+                      </a:endParaRPr>
                     </a:p>
                   </a:txBody>
                   <a:tcPr/>
@@ -15384,10 +15933,18 @@
                     <a:lstStyle/>
                     <a:p>
                       <a:r>
-                        <a:rPr lang="en-US" altLang="zh-CN" dirty="0" smtClean="0"/>
-                        <a:t>256</a:t>
-                      </a:r>
-                      <a:endParaRPr lang="zh-CN" altLang="en-US" dirty="0"/>
+                        <a:rPr lang="en-US" altLang="zh-CN" dirty="0" smtClean="0">
+                          <a:solidFill>
+                            <a:srgbClr val="FF0000"/>
+                          </a:solidFill>
+                        </a:rPr>
+                        <a:t>16M</a:t>
+                      </a:r>
+                      <a:endParaRPr lang="zh-CN" altLang="en-US" dirty="0">
+                        <a:solidFill>
+                          <a:srgbClr val="FF0000"/>
+                        </a:solidFill>
+                      </a:endParaRPr>
                     </a:p>
                   </a:txBody>
                   <a:tcPr/>
@@ -15405,10 +15962,18 @@
                     <a:lstStyle/>
                     <a:p>
                       <a:r>
-                        <a:rPr lang="en-US" altLang="zh-CN" dirty="0" smtClean="0"/>
+                        <a:rPr lang="en-US" altLang="zh-CN" dirty="0" smtClean="0">
+                          <a:solidFill>
+                            <a:schemeClr val="bg2"/>
+                          </a:solidFill>
+                        </a:rPr>
                         <a:t>128k</a:t>
                       </a:r>
-                      <a:endParaRPr lang="zh-CN" altLang="en-US" dirty="0"/>
+                      <a:endParaRPr lang="zh-CN" altLang="en-US" dirty="0">
+                        <a:solidFill>
+                          <a:schemeClr val="bg2"/>
+                        </a:solidFill>
+                      </a:endParaRPr>
                     </a:p>
                   </a:txBody>
                   <a:tcPr/>
@@ -15419,10 +15984,18 @@
                     <a:lstStyle/>
                     <a:p>
                       <a:r>
-                        <a:rPr lang="en-US" altLang="zh-CN" dirty="0" smtClean="0"/>
-                        <a:t>1</a:t>
-                      </a:r>
-                      <a:endParaRPr lang="zh-CN" altLang="en-US" dirty="0"/>
+                        <a:rPr lang="en-US" altLang="zh-CN" dirty="0" smtClean="0">
+                          <a:solidFill>
+                            <a:schemeClr val="bg2"/>
+                          </a:solidFill>
+                        </a:rPr>
+                        <a:t>128k</a:t>
+                      </a:r>
+                      <a:endParaRPr lang="zh-CN" altLang="en-US" dirty="0">
+                        <a:solidFill>
+                          <a:schemeClr val="bg2"/>
+                        </a:solidFill>
+                      </a:endParaRPr>
                     </a:p>
                   </a:txBody>
                   <a:tcPr/>
@@ -15433,10 +16006,18 @@
                     <a:lstStyle/>
                     <a:p>
                       <a:r>
-                        <a:rPr lang="en-US" altLang="zh-CN" dirty="0" smtClean="0"/>
-                        <a:t>2</a:t>
-                      </a:r>
-                      <a:endParaRPr lang="zh-CN" altLang="en-US" dirty="0"/>
+                        <a:rPr lang="en-US" altLang="zh-CN" dirty="0" smtClean="0">
+                          <a:solidFill>
+                            <a:schemeClr val="bg2"/>
+                          </a:solidFill>
+                        </a:rPr>
+                        <a:t>512K</a:t>
+                      </a:r>
+                      <a:endParaRPr lang="zh-CN" altLang="en-US" dirty="0">
+                        <a:solidFill>
+                          <a:schemeClr val="bg2"/>
+                        </a:solidFill>
+                      </a:endParaRPr>
                     </a:p>
                   </a:txBody>
                   <a:tcPr/>
@@ -15447,10 +16028,18 @@
                     <a:lstStyle/>
                     <a:p>
                       <a:r>
-                        <a:rPr lang="en-US" altLang="zh-CN" dirty="0" smtClean="0"/>
-                        <a:t>32</a:t>
-                      </a:r>
-                      <a:endParaRPr lang="zh-CN" altLang="en-US" dirty="0"/>
+                        <a:rPr lang="en-US" altLang="zh-CN" dirty="0" smtClean="0">
+                          <a:solidFill>
+                            <a:schemeClr val="bg2"/>
+                          </a:solidFill>
+                        </a:rPr>
+                        <a:t>2M</a:t>
+                      </a:r>
+                      <a:endParaRPr lang="zh-CN" altLang="en-US" dirty="0">
+                        <a:solidFill>
+                          <a:schemeClr val="bg2"/>
+                        </a:solidFill>
+                      </a:endParaRPr>
                     </a:p>
                   </a:txBody>
                   <a:tcPr/>
@@ -15461,10 +16050,18 @@
                     <a:lstStyle/>
                     <a:p>
                       <a:r>
-                        <a:rPr lang="en-US" altLang="zh-CN" dirty="0" smtClean="0"/>
-                        <a:t>128</a:t>
-                      </a:r>
-                      <a:endParaRPr lang="zh-CN" altLang="en-US" dirty="0"/>
+                        <a:rPr lang="en-US" altLang="zh-CN" dirty="0" smtClean="0">
+                          <a:solidFill>
+                            <a:schemeClr val="bg2"/>
+                          </a:solidFill>
+                        </a:rPr>
+                        <a:t>16M</a:t>
+                      </a:r>
+                      <a:endParaRPr lang="zh-CN" altLang="en-US" dirty="0">
+                        <a:solidFill>
+                          <a:schemeClr val="bg2"/>
+                        </a:solidFill>
+                      </a:endParaRPr>
                     </a:p>
                   </a:txBody>
                   <a:tcPr/>
@@ -15482,10 +16079,18 @@
                     <a:lstStyle/>
                     <a:p>
                       <a:r>
-                        <a:rPr lang="en-US" altLang="zh-CN" dirty="0" smtClean="0"/>
+                        <a:rPr lang="en-US" altLang="zh-CN" dirty="0" smtClean="0">
+                          <a:solidFill>
+                            <a:schemeClr val="bg2"/>
+                          </a:solidFill>
+                        </a:rPr>
                         <a:t>256k</a:t>
                       </a:r>
-                      <a:endParaRPr lang="zh-CN" altLang="en-US" dirty="0"/>
+                      <a:endParaRPr lang="zh-CN" altLang="en-US" dirty="0">
+                        <a:solidFill>
+                          <a:schemeClr val="bg2"/>
+                        </a:solidFill>
+                      </a:endParaRPr>
                     </a:p>
                   </a:txBody>
                   <a:tcPr/>
@@ -15496,10 +16101,18 @@
                     <a:lstStyle/>
                     <a:p>
                       <a:r>
-                        <a:rPr lang="en-US" altLang="zh-CN" dirty="0" smtClean="0"/>
-                        <a:t>1</a:t>
-                      </a:r>
-                      <a:endParaRPr lang="zh-CN" altLang="en-US" dirty="0"/>
+                        <a:rPr lang="en-US" altLang="zh-CN" dirty="0" smtClean="0">
+                          <a:solidFill>
+                            <a:schemeClr val="bg2"/>
+                          </a:solidFill>
+                        </a:rPr>
+                        <a:t>256k</a:t>
+                      </a:r>
+                      <a:endParaRPr lang="zh-CN" altLang="en-US" dirty="0">
+                        <a:solidFill>
+                          <a:schemeClr val="bg2"/>
+                        </a:solidFill>
+                      </a:endParaRPr>
                     </a:p>
                   </a:txBody>
                   <a:tcPr/>
@@ -15510,10 +16123,18 @@
                     <a:lstStyle/>
                     <a:p>
                       <a:r>
-                        <a:rPr lang="en-US" altLang="zh-CN" dirty="0" smtClean="0"/>
-                        <a:t>1</a:t>
-                      </a:r>
-                      <a:endParaRPr lang="zh-CN" altLang="en-US" dirty="0"/>
+                        <a:rPr lang="en-US" altLang="zh-CN" dirty="0" smtClean="0">
+                          <a:solidFill>
+                            <a:schemeClr val="bg2"/>
+                          </a:solidFill>
+                        </a:rPr>
+                        <a:t>512K</a:t>
+                      </a:r>
+                      <a:endParaRPr lang="zh-CN" altLang="en-US" dirty="0">
+                        <a:solidFill>
+                          <a:schemeClr val="bg2"/>
+                        </a:solidFill>
+                      </a:endParaRPr>
                     </a:p>
                   </a:txBody>
                   <a:tcPr/>
@@ -15524,10 +16145,18 @@
                     <a:lstStyle/>
                     <a:p>
                       <a:r>
-                        <a:rPr lang="en-US" altLang="zh-CN" dirty="0" smtClean="0"/>
-                        <a:t>16</a:t>
-                      </a:r>
-                      <a:endParaRPr lang="zh-CN" altLang="en-US" dirty="0"/>
+                        <a:rPr lang="en-US" altLang="zh-CN" dirty="0" smtClean="0">
+                          <a:solidFill>
+                            <a:schemeClr val="bg2"/>
+                          </a:solidFill>
+                        </a:rPr>
+                        <a:t>2M</a:t>
+                      </a:r>
+                      <a:endParaRPr lang="zh-CN" altLang="en-US" dirty="0">
+                        <a:solidFill>
+                          <a:schemeClr val="bg2"/>
+                        </a:solidFill>
+                      </a:endParaRPr>
                     </a:p>
                   </a:txBody>
                   <a:tcPr/>
@@ -15538,10 +16167,18 @@
                     <a:lstStyle/>
                     <a:p>
                       <a:r>
-                        <a:rPr lang="en-US" altLang="zh-CN" dirty="0" smtClean="0"/>
-                        <a:t>64</a:t>
-                      </a:r>
-                      <a:endParaRPr lang="zh-CN" altLang="en-US" dirty="0"/>
+                        <a:rPr lang="en-US" altLang="zh-CN" dirty="0" smtClean="0">
+                          <a:solidFill>
+                            <a:schemeClr val="bg2"/>
+                          </a:solidFill>
+                        </a:rPr>
+                        <a:t>16M</a:t>
+                      </a:r>
+                      <a:endParaRPr lang="zh-CN" altLang="en-US" dirty="0">
+                        <a:solidFill>
+                          <a:schemeClr val="bg2"/>
+                        </a:solidFill>
+                      </a:endParaRPr>
                     </a:p>
                   </a:txBody>
                   <a:tcPr/>
@@ -15616,6 +16253,13 @@
   <p:clrMapOvr>
     <a:masterClrMapping/>
   </p:clrMapOvr>
+  <p:timing>
+    <p:tnLst>
+      <p:par>
+        <p:cTn id="1" dur="indefinite" restart="never" nodeType="tmRoot"/>
+      </p:par>
+    </p:tnLst>
+  </p:timing>
 </p:sld>
 </file>
 
@@ -18128,6 +18772,13 @@
   <p:clrMapOvr>
     <a:masterClrMapping/>
   </p:clrMapOvr>
+  <p:timing>
+    <p:tnLst>
+      <p:par>
+        <p:cTn id="1" dur="indefinite" restart="never" nodeType="tmRoot"/>
+      </p:par>
+    </p:tnLst>
+  </p:timing>
 </p:sld>
 </file>
 
@@ -22021,7 +22672,7 @@
         <p:spPr>
           <a:xfrm>
             <a:off x="838200" y="2409372"/>
-            <a:ext cx="10995318" cy="3693319"/>
+            <a:ext cx="4294765" cy="923330"/>
           </a:xfrm>
           <a:prstGeom prst="rect">
             <a:avLst/>
@@ -22035,137 +22686,36 @@
           <a:lstStyle/>
           <a:p>
             <a:r>
-              <a:rPr lang="en-US" altLang="zh-CN" b="1" baseline="0" dirty="0" smtClean="0">
+              <a:rPr lang="en-US" altLang="zh-CN" b="1" dirty="0" err="1" smtClean="0">
                 <a:solidFill>
-                  <a:srgbClr val="00B050"/>
+                  <a:srgbClr val="FF0000"/>
                 </a:solidFill>
               </a:rPr>
-              <a:t>1</a:t>
+              <a:t>dropCL</a:t>
             </a:r>
-            <a:r>
-              <a:rPr lang="zh-CN" altLang="en-US" b="1" baseline="0" dirty="0" smtClean="0">
-                <a:solidFill>
-                  <a:srgbClr val="00B050"/>
-                </a:solidFill>
-              </a:rPr>
-              <a:t>、</a:t>
-            </a:r>
-            <a:r>
-              <a:rPr lang="en-US" altLang="zh-CN" b="1" baseline="0" dirty="0" smtClean="0">
-                <a:solidFill>
-                  <a:srgbClr val="00B050"/>
-                </a:solidFill>
-              </a:rPr>
-              <a:t>Segment </a:t>
-            </a:r>
-            <a:r>
-              <a:rPr lang="zh-CN" altLang="en-US" b="1" baseline="0" dirty="0" smtClean="0">
-                <a:solidFill>
-                  <a:srgbClr val="00B050"/>
-                </a:solidFill>
-              </a:rPr>
-              <a:t>可以放不同</a:t>
-            </a:r>
-            <a:r>
-              <a:rPr lang="en-US" altLang="zh-CN" b="1" baseline="0" dirty="0" smtClean="0">
-                <a:solidFill>
-                  <a:srgbClr val="00B050"/>
-                </a:solidFill>
-              </a:rPr>
-              <a:t>cl </a:t>
-            </a:r>
-            <a:endParaRPr lang="zh-CN" altLang="en-US" b="1" dirty="0" smtClean="0">
-              <a:solidFill>
-                <a:srgbClr val="00B050"/>
-              </a:solidFill>
-            </a:endParaRPr>
-          </a:p>
-          <a:p>
-            <a:r>
-              <a:rPr lang="en-US" altLang="zh-CN" b="1" dirty="0" smtClean="0">
-                <a:solidFill>
-                  <a:srgbClr val="00B050"/>
-                </a:solidFill>
-              </a:rPr>
-              <a:t>2</a:t>
-            </a:r>
-            <a:r>
-              <a:rPr lang="zh-CN" altLang="en-US" b="1" dirty="0" smtClean="0">
-                <a:solidFill>
-                  <a:srgbClr val="00B050"/>
-                </a:solidFill>
-              </a:rPr>
-              <a:t>、数据文件多节点之间完全一致，是否还有问题（压缩算法）</a:t>
-            </a:r>
-            <a:endParaRPr lang="en-US" altLang="zh-CN" b="1" dirty="0" smtClean="0">
-              <a:solidFill>
-                <a:srgbClr val="00B050"/>
-              </a:solidFill>
-            </a:endParaRPr>
-          </a:p>
-          <a:p>
-            <a:r>
-              <a:rPr lang="en-US" altLang="zh-CN" b="1" dirty="0" smtClean="0">
-                <a:solidFill>
-                  <a:srgbClr val="00B050"/>
-                </a:solidFill>
-              </a:rPr>
-              <a:t>3</a:t>
-            </a:r>
-            <a:r>
-              <a:rPr lang="zh-CN" altLang="en-US" b="1" dirty="0" smtClean="0">
-                <a:solidFill>
-                  <a:srgbClr val="00B050"/>
-                </a:solidFill>
-              </a:rPr>
-              <a:t>、细化</a:t>
-            </a:r>
-            <a:r>
-              <a:rPr lang="en-US" altLang="zh-CN" b="1" dirty="0" smtClean="0">
-                <a:solidFill>
-                  <a:srgbClr val="00B050"/>
-                </a:solidFill>
-              </a:rPr>
-              <a:t>page</a:t>
-            </a:r>
-            <a:r>
-              <a:rPr lang="zh-CN" altLang="en-US" b="1" dirty="0" smtClean="0">
-                <a:solidFill>
-                  <a:srgbClr val="00B050"/>
-                </a:solidFill>
-              </a:rPr>
-              <a:t>分配算法 </a:t>
-            </a:r>
-            <a:r>
-              <a:rPr lang="en-US" altLang="zh-CN" b="1" dirty="0" smtClean="0">
-                <a:solidFill>
-                  <a:srgbClr val="00B050"/>
-                </a:solidFill>
-              </a:rPr>
-              <a:t>bitmap</a:t>
-            </a:r>
-            <a:r>
-              <a:rPr lang="zh-CN" altLang="en-US" b="1" dirty="0" smtClean="0">
-                <a:solidFill>
-                  <a:srgbClr val="00B050"/>
-                </a:solidFill>
-              </a:rPr>
-              <a:t>（有效，无效，锁流程）</a:t>
-            </a:r>
-            <a:endParaRPr lang="en-US" altLang="zh-CN" b="1" dirty="0" smtClean="0">
-              <a:solidFill>
-                <a:srgbClr val="00B050"/>
-              </a:solidFill>
-            </a:endParaRPr>
-          </a:p>
-          <a:p>
             <a:r>
               <a:rPr lang="en-US" altLang="zh-CN" b="1" dirty="0" smtClean="0">
                 <a:solidFill>
                   <a:srgbClr val="FF0000"/>
                 </a:solidFill>
               </a:rPr>
-              <a:t>4</a:t>
+              <a:t> </a:t>
+            </a:r>
+            <a:r>
+              <a:rPr lang="zh-CN" altLang="en-US" b="1" dirty="0" smtClean="0">
+                <a:solidFill>
+                  <a:srgbClr val="FF0000"/>
+                </a:solidFill>
+              </a:rPr>
+              <a:t>与 </a:t>
+            </a:r>
+            <a:r>
+              <a:rPr lang="en-US" altLang="zh-CN" b="1" dirty="0" smtClean="0">
+                <a:solidFill>
+                  <a:srgbClr val="FF0000"/>
+                </a:solidFill>
+              </a:rPr>
+              <a:t>query</a:t>
             </a:r>
             <a:r>
               <a:rPr lang="zh-CN" altLang="en-US" b="1" dirty="0" smtClean="0">
@@ -22181,85 +22731,7 @@
                   <a:srgbClr val="FF0000"/>
                 </a:solidFill>
               </a:rPr>
-              <a:t>checkpoint</a:t>
-            </a:r>
-            <a:r>
-              <a:rPr lang="zh-CN" altLang="en-US" b="1" dirty="0" smtClean="0">
-                <a:solidFill>
-                  <a:srgbClr val="FF0000"/>
-                </a:solidFill>
-              </a:rPr>
-              <a:t>、页本身的校验。</a:t>
-            </a:r>
-            <a:endParaRPr lang="en-US" altLang="zh-CN" b="1" dirty="0" smtClean="0">
-              <a:solidFill>
-                <a:srgbClr val="FF0000"/>
-              </a:solidFill>
-            </a:endParaRPr>
-          </a:p>
-          <a:p>
-            <a:r>
-              <a:rPr lang="en-US" altLang="zh-CN" b="1" dirty="0" smtClean="0">
-                <a:solidFill>
-                  <a:srgbClr val="FF0000"/>
-                </a:solidFill>
-              </a:rPr>
-              <a:t>5</a:t>
-            </a:r>
-            <a:r>
-              <a:rPr lang="zh-CN" altLang="en-US" b="1" dirty="0" smtClean="0">
-                <a:solidFill>
-                  <a:srgbClr val="FF0000"/>
-                </a:solidFill>
-              </a:rPr>
-              <a:t>、</a:t>
-            </a:r>
-            <a:r>
-              <a:rPr lang="en-US" altLang="zh-CN" b="1" dirty="0" err="1" smtClean="0">
-                <a:solidFill>
-                  <a:srgbClr val="FF0000"/>
-                </a:solidFill>
-              </a:rPr>
-              <a:t>mvcc</a:t>
-            </a:r>
-            <a:r>
-              <a:rPr lang="zh-CN" altLang="en-US" b="1" dirty="0" smtClean="0">
-                <a:solidFill>
-                  <a:srgbClr val="FF0000"/>
-                </a:solidFill>
-              </a:rPr>
-              <a:t>（</a:t>
-            </a:r>
-            <a:r>
-              <a:rPr lang="en-US" altLang="zh-CN" b="1" dirty="0" smtClean="0">
-                <a:solidFill>
-                  <a:srgbClr val="FF0000"/>
-                </a:solidFill>
-              </a:rPr>
-              <a:t>LSM tree</a:t>
-            </a:r>
-            <a:r>
-              <a:rPr lang="zh-CN" altLang="en-US" b="1" dirty="0" smtClean="0">
-                <a:solidFill>
-                  <a:srgbClr val="FF0000"/>
-                </a:solidFill>
-              </a:rPr>
-              <a:t>）</a:t>
-            </a:r>
-            <a:endParaRPr lang="en-US" altLang="zh-CN" b="1" dirty="0" smtClean="0">
-              <a:solidFill>
-                <a:srgbClr val="FF0000"/>
-              </a:solidFill>
-            </a:endParaRPr>
-          </a:p>
-          <a:p>
-            <a:r>
-              <a:rPr lang="en-US" altLang="zh-CN" b="1" dirty="0" smtClean="0">
-                <a:solidFill>
-                  <a:srgbClr val="FF0000"/>
-                </a:solidFill>
-              </a:rPr>
-              <a:t>6</a:t>
+              <a:t>insert</a:t>
             </a:r>
             <a:r>
               <a:rPr lang="zh-CN" altLang="en-US" b="1" dirty="0" smtClean="0">
@@ -22275,7 +22747,7 @@
                   <a:srgbClr val="FF0000"/>
                 </a:solidFill>
               </a:rPr>
-              <a:t>v1</a:t>
+              <a:t>delete</a:t>
             </a:r>
             <a:r>
               <a:rPr lang="zh-CN" altLang="en-US" b="1" dirty="0" smtClean="0">
@@ -22283,227 +22755,8 @@
                   <a:srgbClr val="FF0000"/>
                 </a:solidFill>
               </a:rPr>
-              <a:t>，</a:t>
+              <a:t>的并发</a:t>
             </a:r>
-            <a:r>
-              <a:rPr lang="en-US" altLang="zh-CN" b="1" dirty="0" smtClean="0">
-                <a:solidFill>
-                  <a:srgbClr val="FF0000"/>
-                </a:solidFill>
-              </a:rPr>
-              <a:t>v2</a:t>
-            </a:r>
-            <a:r>
-              <a:rPr lang="zh-CN" altLang="en-US" b="1" dirty="0" smtClean="0">
-                <a:solidFill>
-                  <a:srgbClr val="FF0000"/>
-                </a:solidFill>
-              </a:rPr>
-              <a:t>引擎共存时，如何保证数据正确及正常切换</a:t>
-            </a:r>
-            <a:endParaRPr lang="en-US" altLang="zh-CN" b="1" dirty="0">
-              <a:solidFill>
-                <a:srgbClr val="FF0000"/>
-              </a:solidFill>
-            </a:endParaRPr>
-          </a:p>
-          <a:p>
-            <a:r>
-              <a:rPr lang="en-US" altLang="zh-CN" b="1" dirty="0" smtClean="0">
-                <a:solidFill>
-                  <a:srgbClr val="FF0000"/>
-                </a:solidFill>
-              </a:rPr>
-              <a:t>7</a:t>
-            </a:r>
-            <a:r>
-              <a:rPr lang="zh-CN" altLang="en-US" b="1" dirty="0" smtClean="0">
-                <a:solidFill>
-                  <a:srgbClr val="FF0000"/>
-                </a:solidFill>
-              </a:rPr>
-              <a:t>、</a:t>
-            </a:r>
-            <a:r>
-              <a:rPr lang="en-US" altLang="zh-CN" b="1" dirty="0" err="1" smtClean="0">
-                <a:solidFill>
-                  <a:srgbClr val="FF0000"/>
-                </a:solidFill>
-              </a:rPr>
-              <a:t>dps</a:t>
-            </a:r>
-            <a:r>
-              <a:rPr lang="zh-CN" altLang="en-US" b="1" dirty="0" smtClean="0">
-                <a:solidFill>
-                  <a:srgbClr val="FF0000"/>
-                </a:solidFill>
-              </a:rPr>
-              <a:t>日志如何写？（文件中的元数据，压缩字典，数据，创表等操作）</a:t>
-            </a:r>
-            <a:endParaRPr lang="en-US" altLang="zh-CN" b="1" dirty="0" smtClean="0">
-              <a:solidFill>
-                <a:srgbClr val="FF0000"/>
-              </a:solidFill>
-            </a:endParaRPr>
-          </a:p>
-          <a:p>
-            <a:r>
-              <a:rPr lang="en-US" altLang="zh-CN" b="1" dirty="0" smtClean="0">
-                <a:solidFill>
-                  <a:srgbClr val="FF0000"/>
-                </a:solidFill>
-              </a:rPr>
-              <a:t>8</a:t>
-            </a:r>
-            <a:r>
-              <a:rPr lang="zh-CN" altLang="en-US" b="1" dirty="0" smtClean="0">
-                <a:solidFill>
-                  <a:srgbClr val="FF0000"/>
-                </a:solidFill>
-              </a:rPr>
-              <a:t>、数据块恢复， 当本地数据块损坏时，如何获取对端的数据块，同时要保证</a:t>
-            </a:r>
-            <a:r>
-              <a:rPr lang="en-US" altLang="zh-CN" b="1" dirty="0" smtClean="0">
-                <a:solidFill>
-                  <a:srgbClr val="FF0000"/>
-                </a:solidFill>
-              </a:rPr>
-              <a:t>LSN</a:t>
-            </a:r>
-            <a:r>
-              <a:rPr lang="zh-CN" altLang="en-US" b="1" dirty="0" smtClean="0">
-                <a:solidFill>
-                  <a:srgbClr val="FF0000"/>
-                </a:solidFill>
-              </a:rPr>
-              <a:t>的一致性。</a:t>
-            </a:r>
-            <a:endParaRPr lang="en-US" altLang="zh-CN" b="1" dirty="0" smtClean="0">
-              <a:solidFill>
-                <a:srgbClr val="FF0000"/>
-              </a:solidFill>
-            </a:endParaRPr>
-          </a:p>
-          <a:p>
-            <a:r>
-              <a:rPr lang="en-US" altLang="zh-CN" b="1" dirty="0">
-                <a:solidFill>
-                  <a:srgbClr val="FF0000"/>
-                </a:solidFill>
-              </a:rPr>
-              <a:t> </a:t>
-            </a:r>
-            <a:r>
-              <a:rPr lang="en-US" altLang="zh-CN" b="1" dirty="0" smtClean="0">
-                <a:solidFill>
-                  <a:srgbClr val="FF0000"/>
-                </a:solidFill>
-              </a:rPr>
-              <a:t>     </a:t>
-            </a:r>
-            <a:r>
-              <a:rPr lang="zh-CN" altLang="en-US" b="1" dirty="0" smtClean="0">
-                <a:solidFill>
-                  <a:srgbClr val="FF0000"/>
-                </a:solidFill>
-              </a:rPr>
-              <a:t>如本地事务才到</a:t>
-            </a:r>
-            <a:r>
-              <a:rPr lang="en-US" altLang="zh-CN" b="1" dirty="0" smtClean="0">
-                <a:solidFill>
-                  <a:srgbClr val="FF0000"/>
-                </a:solidFill>
-              </a:rPr>
-              <a:t>100</a:t>
-            </a:r>
-            <a:r>
-              <a:rPr lang="zh-CN" altLang="en-US" b="1" dirty="0" smtClean="0">
-                <a:solidFill>
-                  <a:srgbClr val="FF0000"/>
-                </a:solidFill>
-              </a:rPr>
-              <a:t>，而对端发过来的数据块已经到</a:t>
-            </a:r>
-            <a:r>
-              <a:rPr lang="en-US" altLang="zh-CN" b="1" dirty="0" smtClean="0">
-                <a:solidFill>
-                  <a:srgbClr val="FF0000"/>
-                </a:solidFill>
-              </a:rPr>
-              <a:t>200</a:t>
-            </a:r>
-            <a:r>
-              <a:rPr lang="zh-CN" altLang="en-US" b="1" dirty="0" smtClean="0">
-                <a:solidFill>
-                  <a:srgbClr val="FF0000"/>
-                </a:solidFill>
-              </a:rPr>
-              <a:t>了，此时备节点是没有</a:t>
-            </a:r>
-            <a:r>
-              <a:rPr lang="en-US" altLang="zh-CN" b="1" dirty="0" smtClean="0">
-                <a:solidFill>
-                  <a:srgbClr val="FF0000"/>
-                </a:solidFill>
-              </a:rPr>
-              <a:t>100-200</a:t>
-            </a:r>
-            <a:r>
-              <a:rPr lang="zh-CN" altLang="en-US" b="1" dirty="0" smtClean="0">
-                <a:solidFill>
-                  <a:srgbClr val="FF0000"/>
-                </a:solidFill>
-              </a:rPr>
-              <a:t>之间的事务的。</a:t>
-            </a:r>
-            <a:endParaRPr lang="en-US" altLang="zh-CN" b="1" dirty="0">
-              <a:solidFill>
-                <a:srgbClr val="FF0000"/>
-              </a:solidFill>
-            </a:endParaRPr>
-          </a:p>
-          <a:p>
-            <a:r>
-              <a:rPr lang="zh-CN" altLang="en-US" b="1" dirty="0" smtClean="0">
-                <a:solidFill>
-                  <a:srgbClr val="FF0000"/>
-                </a:solidFill>
-              </a:rPr>
-              <a:t>文件、</a:t>
-            </a:r>
-            <a:r>
-              <a:rPr lang="en-US" altLang="zh-CN" b="1" dirty="0" smtClean="0">
-                <a:solidFill>
-                  <a:srgbClr val="FF0000"/>
-                </a:solidFill>
-              </a:rPr>
-              <a:t>checkpoint</a:t>
-            </a:r>
-            <a:r>
-              <a:rPr lang="zh-CN" altLang="en-US" b="1" dirty="0" smtClean="0">
-                <a:solidFill>
-                  <a:srgbClr val="FF0000"/>
-                </a:solidFill>
-              </a:rPr>
-              <a:t>、</a:t>
-            </a:r>
-            <a:r>
-              <a:rPr lang="en-US" altLang="zh-CN" b="1" dirty="0" err="1" smtClean="0">
-                <a:solidFill>
-                  <a:srgbClr val="FF0000"/>
-                </a:solidFill>
-              </a:rPr>
-              <a:t>wal</a:t>
-            </a:r>
-            <a:endParaRPr lang="en-US" altLang="zh-CN" b="1" dirty="0" smtClean="0">
-              <a:solidFill>
-                <a:srgbClr val="FF0000"/>
-              </a:solidFill>
-            </a:endParaRPr>
-          </a:p>
-          <a:p>
             <a:endParaRPr lang="en-US" altLang="zh-CN" b="1" dirty="0" smtClean="0">
               <a:solidFill>
                 <a:srgbClr val="FF0000"/>
@@ -22543,59 +22796,6 @@
       </p:par>
     </p:tnLst>
   </p:timing>
-</p:sld>
-</file>
-
-<file path=ppt/slides/slide17.xml><?xml version="1.0" encoding="utf-8"?>
-<p:sld xmlns:a="http://schemas.openxmlformats.org/drawingml/2006/main" xmlns:r="http://schemas.openxmlformats.org/officeDocument/2006/relationships" xmlns:p="http://schemas.openxmlformats.org/presentationml/2006/main">
-  <p:cSld>
-    <p:spTree>
-      <p:nvGrpSpPr>
-        <p:cNvPr id="1" name=""/>
-        <p:cNvGrpSpPr/>
-        <p:nvPr/>
-      </p:nvGrpSpPr>
-      <p:grpSpPr>
-        <a:xfrm>
-          <a:off x="0" y="0"/>
-          <a:ext cx="0" cy="0"/>
-          <a:chOff x="0" y="0"/>
-          <a:chExt cx="0" cy="0"/>
-        </a:xfrm>
-      </p:grpSpPr>
-      <p:sp>
-        <p:nvSpPr>
-          <p:cNvPr id="2" name="标题 1"/>
-          <p:cNvSpPr>
-            <a:spLocks noGrp="1"/>
-          </p:cNvSpPr>
-          <p:nvPr>
-            <p:ph type="title"/>
-          </p:nvPr>
-        </p:nvSpPr>
-        <p:spPr/>
-        <p:txBody>
-          <a:bodyPr/>
-          <a:lstStyle/>
-          <a:p>
-            <a:r>
-              <a:rPr lang="zh-CN" altLang="en-US" dirty="0" smtClean="0"/>
-              <a:t>待讨论问题</a:t>
-            </a:r>
-            <a:endParaRPr lang="zh-CN" altLang="en-US" dirty="0"/>
-          </a:p>
-        </p:txBody>
-      </p:sp>
-    </p:spTree>
-    <p:extLst>
-      <p:ext uri="{BB962C8B-B14F-4D97-AF65-F5344CB8AC3E}">
-        <p14:creationId xmlns:p14="http://schemas.microsoft.com/office/powerpoint/2010/main" val="2654299133"/>
-      </p:ext>
-    </p:extLst>
-  </p:cSld>
-  <p:clrMapOvr>
-    <a:masterClrMapping/>
-  </p:clrMapOvr>
 </p:sld>
 </file>
 
@@ -22959,7 +23159,7 @@
             </a:r>
             <a:r>
               <a:rPr lang="zh-CN" altLang="en-US" dirty="0" smtClean="0"/>
-              <a:t>按</a:t>
+              <a:t>内的</a:t>
             </a:r>
             <a:r>
               <a:rPr lang="en-US" altLang="zh-CN" dirty="0" smtClean="0"/>
@@ -22967,7 +23167,11 @@
             </a:r>
             <a:r>
               <a:rPr lang="zh-CN" altLang="en-US" dirty="0" smtClean="0"/>
-              <a:t>放不同</a:t>
+              <a:t>可以放</a:t>
+            </a:r>
+            <a:r>
+              <a:rPr lang="zh-CN" altLang="en-US" dirty="0" smtClean="0"/>
+              <a:t>不同</a:t>
             </a:r>
             <a:r>
               <a:rPr lang="en-US" altLang="zh-CN" dirty="0" smtClean="0"/>
@@ -24376,7 +24580,7 @@
         </p:nvSpPr>
         <p:spPr>
           <a:xfrm>
-            <a:off x="7132487" y="5521124"/>
+            <a:off x="7071573" y="6165068"/>
             <a:ext cx="2528256" cy="369332"/>
           </a:xfrm>
           <a:prstGeom prst="rect">
@@ -24414,7 +24618,7 @@
         </p:nvSpPr>
         <p:spPr>
           <a:xfrm>
-            <a:off x="648390" y="5521124"/>
+            <a:off x="648389" y="6165068"/>
             <a:ext cx="4859022" cy="369332"/>
           </a:xfrm>
           <a:prstGeom prst="rect">
@@ -24452,7 +24656,7 @@
         </p:nvSpPr>
         <p:spPr>
           <a:xfrm>
-            <a:off x="2473408" y="4564449"/>
+            <a:off x="2473407" y="5461937"/>
             <a:ext cx="1208985" cy="369332"/>
           </a:xfrm>
           <a:prstGeom prst="rect">
@@ -24486,7 +24690,7 @@
         </p:nvSpPr>
         <p:spPr>
           <a:xfrm>
-            <a:off x="7731208" y="4552823"/>
+            <a:off x="7551672" y="5461937"/>
             <a:ext cx="1568058" cy="369332"/>
           </a:xfrm>
           <a:prstGeom prst="rect">
@@ -43062,6 +43266,13 @@
   <p:clrMapOvr>
     <a:masterClrMapping/>
   </p:clrMapOvr>
+  <p:timing>
+    <p:tnLst>
+      <p:par>
+        <p:cTn id="1" dur="indefinite" restart="never" nodeType="tmRoot"/>
+      </p:par>
+    </p:tnLst>
+  </p:timing>
 </p:sld>
 </file>
 
